--- a/말빛_AAC_웹앱_시연설명.pptx
+++ b/말빛_AAC_웹앱_시연설명.pptx
@@ -2169,7 +2169,7 @@
         <p:spPr>
           <a:xfrm>
             <a:off x="731520" y="1371600"/>
-            <a:ext cx="6766560" cy="1371600"/>
+            <a:ext cx="6766560" cy="1481328"/>
           </a:xfrm>
           <a:prstGeom prst="rect">
             <a:avLst/>
@@ -2644,7 +2644,7 @@
         <p:spPr>
           <a:xfrm>
             <a:off x="566928" y="1938528"/>
-            <a:ext cx="3200400" cy="2593051"/>
+            <a:ext cx="3063240" cy="2481921"/>
           </a:xfrm>
           <a:prstGeom prst="rect">
             <a:avLst/>
@@ -2666,8 +2666,8 @@
         </p:nvSpPr>
         <p:spPr>
           <a:xfrm>
-            <a:off x="566928" y="4677883"/>
-            <a:ext cx="3200400" cy="274320"/>
+            <a:off x="566928" y="4548465"/>
+            <a:ext cx="3063240" cy="274320"/>
           </a:xfrm>
           <a:prstGeom prst="rect">
             <a:avLst/>
@@ -2705,8 +2705,8 @@
         </p:nvSpPr>
         <p:spPr>
           <a:xfrm>
-            <a:off x="566928" y="4970491"/>
-            <a:ext cx="3200400" cy="256032"/>
+            <a:off x="566928" y="4822785"/>
+            <a:ext cx="3063240" cy="256032"/>
           </a:xfrm>
           <a:prstGeom prst="rect">
             <a:avLst/>
@@ -2744,8 +2744,8 @@
         </p:nvSpPr>
         <p:spPr>
           <a:xfrm>
-            <a:off x="566928" y="5263099"/>
-            <a:ext cx="3200400" cy="731520"/>
+            <a:off x="566928" y="5097105"/>
+            <a:ext cx="3063240" cy="640080"/>
           </a:xfrm>
           <a:prstGeom prst="rect">
             <a:avLst/>
@@ -2772,7 +2772,7 @@
                 <a:ea typeface="맑은 고딕" pitchFamily="34" charset="-122"/>
                 <a:cs typeface="맑은 고딕" pitchFamily="34" charset="-120"/>
               </a:rPr>
-              <a:t>손떨림이 있어 버튼을 크게, 색 대비를 높이고 누르기 유지와 확인 단계를 켰습니다.</a:t>
+              <a:t>손떨림이 있어 버튼을 크게, 대비를 높이고 확인 단계를 켰습니다.</a:t>
             </a:r>
             <a:endParaRPr lang="en-US" sz="1100" dirty="0"/>
           </a:p>
@@ -2794,8 +2794,8 @@
         </p:blipFill>
         <p:spPr>
           <a:xfrm>
-            <a:off x="4443984" y="1938528"/>
-            <a:ext cx="3200400" cy="2593051"/>
+            <a:off x="4562856" y="1938528"/>
+            <a:ext cx="3063240" cy="2481921"/>
           </a:xfrm>
           <a:prstGeom prst="rect">
             <a:avLst/>
@@ -2817,8 +2817,8 @@
         </p:nvSpPr>
         <p:spPr>
           <a:xfrm>
-            <a:off x="4443984" y="4677883"/>
-            <a:ext cx="3200400" cy="274320"/>
+            <a:off x="4562856" y="4548465"/>
+            <a:ext cx="3063240" cy="274320"/>
           </a:xfrm>
           <a:prstGeom prst="rect">
             <a:avLst/>
@@ -2856,8 +2856,8 @@
         </p:nvSpPr>
         <p:spPr>
           <a:xfrm>
-            <a:off x="4443984" y="4970491"/>
-            <a:ext cx="3200400" cy="256032"/>
+            <a:off x="4562856" y="4822785"/>
+            <a:ext cx="3063240" cy="256032"/>
           </a:xfrm>
           <a:prstGeom prst="rect">
             <a:avLst/>
@@ -2895,8 +2895,8 @@
         </p:nvSpPr>
         <p:spPr>
           <a:xfrm>
-            <a:off x="4443984" y="5263099"/>
-            <a:ext cx="3200400" cy="731520"/>
+            <a:off x="4562856" y="5097105"/>
+            <a:ext cx="3063240" cy="640080"/>
           </a:xfrm>
           <a:prstGeom prst="rect">
             <a:avLst/>
@@ -2923,7 +2923,7 @@
                 <a:ea typeface="맑은 고딕" pitchFamily="34" charset="-122"/>
                 <a:cs typeface="맑은 고딕" pitchFamily="34" charset="-120"/>
               </a:rPr>
-              <a:t>직접 누르기 어려워 항목이 차례로 강조되면 원하는 순간 확인키를 누릅니다.</a:t>
+              <a:t>직접 누르기 어려워 항목이 강조될 때 확인키를 누릅니다.</a:t>
             </a:r>
             <a:endParaRPr lang="en-US" sz="1100" dirty="0"/>
           </a:p>
@@ -2945,8 +2945,8 @@
         </p:blipFill>
         <p:spPr>
           <a:xfrm>
-            <a:off x="8321040" y="1938528"/>
-            <a:ext cx="3200400" cy="2593051"/>
+            <a:off x="8558784" y="1938528"/>
+            <a:ext cx="3063240" cy="2481921"/>
           </a:xfrm>
           <a:prstGeom prst="rect">
             <a:avLst/>
@@ -2968,8 +2968,8 @@
         </p:nvSpPr>
         <p:spPr>
           <a:xfrm>
-            <a:off x="8321040" y="4677883"/>
-            <a:ext cx="3200400" cy="274320"/>
+            <a:off x="8558784" y="4548465"/>
+            <a:ext cx="3063240" cy="274320"/>
           </a:xfrm>
           <a:prstGeom prst="rect">
             <a:avLst/>
@@ -3007,8 +3007,8 @@
         </p:nvSpPr>
         <p:spPr>
           <a:xfrm>
-            <a:off x="8321040" y="4970491"/>
-            <a:ext cx="3200400" cy="256032"/>
+            <a:off x="8558784" y="4822785"/>
+            <a:ext cx="3063240" cy="256032"/>
           </a:xfrm>
           <a:prstGeom prst="rect">
             <a:avLst/>
@@ -3046,8 +3046,8 @@
         </p:nvSpPr>
         <p:spPr>
           <a:xfrm>
-            <a:off x="8321040" y="5263099"/>
-            <a:ext cx="3200400" cy="731520"/>
+            <a:off x="8558784" y="5097105"/>
+            <a:ext cx="3063240" cy="640080"/>
           </a:xfrm>
           <a:prstGeom prst="rect">
             <a:avLst/>
@@ -3088,12 +3088,12 @@
         </p:nvSpPr>
         <p:spPr>
           <a:xfrm>
-            <a:off x="566928" y="5742432"/>
-            <a:ext cx="11064240" cy="658368"/>
+            <a:off x="566928" y="5852160"/>
+            <a:ext cx="11064240" cy="548640"/>
           </a:xfrm>
           <a:prstGeom prst="roundRect">
             <a:avLst>
-              <a:gd name="adj" fmla="val 12500"/>
+              <a:gd name="adj" fmla="val 15000"/>
             </a:avLst>
           </a:prstGeom>
           <a:solidFill>
@@ -3115,8 +3115,8 @@
         </p:nvSpPr>
         <p:spPr>
           <a:xfrm>
-            <a:off x="868680" y="5742432"/>
-            <a:ext cx="10515600" cy="658368"/>
+            <a:off x="868680" y="5852160"/>
+            <a:ext cx="10515600" cy="548640"/>
           </a:xfrm>
           <a:prstGeom prst="rect">
             <a:avLst/>
@@ -7082,8 +7082,8 @@
         </p:nvSpPr>
         <p:spPr>
           <a:xfrm>
-            <a:off x="822960" y="1755648"/>
-            <a:ext cx="2971800" cy="658368"/>
+            <a:off x="822960" y="1737360"/>
+            <a:ext cx="2971800" cy="749808"/>
           </a:xfrm>
           <a:prstGeom prst="rect">
             <a:avLst/>
@@ -7229,8 +7229,8 @@
         </p:nvSpPr>
         <p:spPr>
           <a:xfrm>
-            <a:off x="4617720" y="1755648"/>
-            <a:ext cx="2971800" cy="658368"/>
+            <a:off x="4617720" y="1737360"/>
+            <a:ext cx="2971800" cy="749808"/>
           </a:xfrm>
           <a:prstGeom prst="rect">
             <a:avLst/>
@@ -7376,8 +7376,8 @@
         </p:nvSpPr>
         <p:spPr>
           <a:xfrm>
-            <a:off x="8412480" y="1755648"/>
-            <a:ext cx="2971800" cy="658368"/>
+            <a:off x="8412480" y="1737360"/>
+            <a:ext cx="2971800" cy="749808"/>
           </a:xfrm>
           <a:prstGeom prst="rect">
             <a:avLst/>
@@ -12174,8 +12174,8 @@
         </p:blipFill>
         <p:spPr>
           <a:xfrm>
-            <a:off x="1340968" y="1691640"/>
-            <a:ext cx="4297680" cy="3482098"/>
+            <a:off x="1615288" y="1691640"/>
+            <a:ext cx="4023360" cy="3259836"/>
           </a:xfrm>
           <a:prstGeom prst="rect">
             <a:avLst/>
@@ -12205,8 +12205,8 @@
         </p:blipFill>
         <p:spPr>
           <a:xfrm>
-            <a:off x="6553048" y="1769780"/>
-            <a:ext cx="4297680" cy="3403958"/>
+            <a:off x="6553048" y="1764792"/>
+            <a:ext cx="4023360" cy="3186684"/>
           </a:xfrm>
           <a:prstGeom prst="rect">
             <a:avLst/>
@@ -12228,8 +12228,8 @@
         </p:nvSpPr>
         <p:spPr>
           <a:xfrm>
-            <a:off x="1340968" y="5256034"/>
-            <a:ext cx="4297680" cy="274320"/>
+            <a:off x="1615288" y="5033772"/>
+            <a:ext cx="4023360" cy="274320"/>
           </a:xfrm>
           <a:prstGeom prst="rect">
             <a:avLst/>
@@ -12267,8 +12267,8 @@
         </p:nvSpPr>
         <p:spPr>
           <a:xfrm>
-            <a:off x="6553048" y="5256034"/>
-            <a:ext cx="4297680" cy="274320"/>
+            <a:off x="6553048" y="5033772"/>
+            <a:ext cx="4023360" cy="274320"/>
           </a:xfrm>
           <a:prstGeom prst="rect">
             <a:avLst/>
